--- a/scripts/output/demo_marzo_2026.pptx
+++ b/scripts/output/demo_marzo_2026.pptx
@@ -8329,7 +8329,7 @@
                 <a:ea typeface="Calibri" pitchFamily="34" charset="-122"/>
                 <a:cs typeface="Calibri" pitchFamily="34" charset="-120"/>
               </a:rPr>
-              <a:t>●●● Alta confianza</a:t>
+              <a:t>Alta confianza confianza</a:t>
             </a:r>
             <a:endParaRPr lang="en-US" sz="1400" dirty="0"/>
           </a:p>
@@ -8510,7 +8510,7 @@
                 <a:ea typeface="Calibri" pitchFamily="34" charset="-122"/>
                 <a:cs typeface="Calibri" pitchFamily="34" charset="-120"/>
               </a:rPr>
-              <a:t>●●○ Media confianza</a:t>
+              <a:t>Media confianza confianza</a:t>
             </a:r>
             <a:endParaRPr lang="en-US" sz="1400" dirty="0"/>
           </a:p>
@@ -8691,7 +8691,7 @@
                 <a:ea typeface="Calibri" pitchFamily="34" charset="-122"/>
                 <a:cs typeface="Calibri" pitchFamily="34" charset="-120"/>
               </a:rPr>
-              <a:t>●○○ Baja confianza</a:t>
+              <a:t>Baja confianza confianza</a:t>
             </a:r>
             <a:endParaRPr lang="en-US" sz="1400" dirty="0"/>
           </a:p>

--- a/scripts/output/demo_marzo_2026.pptx
+++ b/scripts/output/demo_marzo_2026.pptx
@@ -8329,7 +8329,7 @@
                 <a:ea typeface="Calibri" pitchFamily="34" charset="-122"/>
                 <a:cs typeface="Calibri" pitchFamily="34" charset="-120"/>
               </a:rPr>
-              <a:t>Alta confianza confianza</a:t>
+              <a:t>Alta confianza</a:t>
             </a:r>
             <a:endParaRPr lang="en-US" sz="1400" dirty="0"/>
           </a:p>
@@ -8510,7 +8510,7 @@
                 <a:ea typeface="Calibri" pitchFamily="34" charset="-122"/>
                 <a:cs typeface="Calibri" pitchFamily="34" charset="-120"/>
               </a:rPr>
-              <a:t>Media confianza confianza</a:t>
+              <a:t>Media confianza</a:t>
             </a:r>
             <a:endParaRPr lang="en-US" sz="1400" dirty="0"/>
           </a:p>
@@ -8691,7 +8691,7 @@
                 <a:ea typeface="Calibri" pitchFamily="34" charset="-122"/>
                 <a:cs typeface="Calibri" pitchFamily="34" charset="-120"/>
               </a:rPr>
-              <a:t>Baja confianza confianza</a:t>
+              <a:t>Baja confianza</a:t>
             </a:r>
             <a:endParaRPr lang="en-US" sz="1400" dirty="0"/>
           </a:p>
